--- a/Homework/DL_FactoryAutomation/산출물/딥러닝_FEMTO_RUL_발표자료_v2.pptx
+++ b/Homework/DL_FactoryAutomation/산출물/딥러닝_FEMTO_RUL_발표자료_v2.pptx
@@ -1785,6 +1785,10 @@
           </a:solidFill>
           <a:ln/>
         </p:spPr>
+        <p:txBody>
+          <a:bodyPr/>
+          <a:p/>
+        </p:txBody>
       </p:sp>
       <p:sp>
         <p:nvSpPr>
@@ -1805,6 +1809,10 @@
           </a:solidFill>
           <a:ln/>
         </p:spPr>
+        <p:txBody>
+          <a:bodyPr/>
+          <a:p/>
+        </p:txBody>
       </p:sp>
       <p:sp>
         <p:nvSpPr>
@@ -1945,6 +1953,10 @@
             <a:prstDash val="solid"/>
           </a:ln>
         </p:spPr>
+        <p:txBody>
+          <a:bodyPr/>
+          <a:p/>
+        </p:txBody>
       </p:sp>
       <p:sp>
         <p:nvSpPr>
@@ -2081,6 +2093,10 @@
           </a:solidFill>
           <a:ln/>
         </p:spPr>
+        <p:txBody>
+          <a:bodyPr/>
+          <a:p/>
+        </p:txBody>
       </p:sp>
       <p:sp>
         <p:nvSpPr>
@@ -2221,6 +2237,10 @@
             <a:prstDash val="solid"/>
           </a:ln>
         </p:spPr>
+        <p:txBody>
+          <a:bodyPr/>
+          <a:p/>
+        </p:txBody>
       </p:sp>
       <p:sp>
         <p:nvSpPr>
@@ -3265,6 +3285,10 @@
             <a:prstDash val="solid"/>
           </a:ln>
         </p:spPr>
+        <p:txBody>
+          <a:bodyPr/>
+          <a:p/>
+        </p:txBody>
       </p:sp>
       <p:sp>
         <p:nvSpPr>
@@ -4353,6 +4377,10 @@
           </a:solidFill>
           <a:ln/>
         </p:spPr>
+        <p:txBody>
+          <a:bodyPr/>
+          <a:p/>
+        </p:txBody>
       </p:sp>
       <p:sp>
         <p:nvSpPr>
@@ -4465,7 +4493,7 @@
                 <a:ea typeface="Malgun Gothic" pitchFamily="34" charset="-122"/>
                 <a:cs typeface="Malgun Gothic" pitchFamily="34" charset="-120"/>
               </a:rPr>
-              <a:t>5탭 대시보드 / 시스템 품질 PASS</a:t>
+              <a:t>6탭 대시보드 / 시스템 품질 PASS</a:t>
             </a:r>
             <a:endParaRPr lang="en-US" sz="1250" dirty="0"/>
           </a:p>
@@ -4493,6 +4521,10 @@
             <a:prstDash val="solid"/>
           </a:ln>
         </p:spPr>
+        <p:txBody>
+          <a:bodyPr/>
+          <a:p/>
+        </p:txBody>
       </p:sp>
       <p:sp>
         <p:nvSpPr>
@@ -4527,7 +4559,7 @@
                 <a:ea typeface="Malgun Gothic" pitchFamily="34" charset="-122"/>
                 <a:cs typeface="Malgun Gothic" pitchFamily="34" charset="-120"/>
               </a:rPr>
-              <a:t>5탭 구성</a:t>
+              <a:t>6탭 구성</a:t>
             </a:r>
             <a:endParaRPr lang="en-US" sz="1300" dirty="0"/>
           </a:p>
@@ -4559,6 +4591,10 @@
             <a:prstDash val="solid"/>
           </a:ln>
         </p:spPr>
+        <p:txBody>
+          <a:bodyPr/>
+          <a:p/>
+        </p:txBody>
       </p:sp>
       <p:sp>
         <p:nvSpPr>
@@ -4625,6 +4661,10 @@
             <a:prstDash val="solid"/>
           </a:ln>
         </p:spPr>
+        <p:txBody>
+          <a:bodyPr/>
+          <a:p/>
+        </p:txBody>
       </p:sp>
       <p:sp>
         <p:nvSpPr>
@@ -4691,6 +4731,10 @@
             <a:prstDash val="solid"/>
           </a:ln>
         </p:spPr>
+        <p:txBody>
+          <a:bodyPr/>
+          <a:p/>
+        </p:txBody>
       </p:sp>
       <p:sp>
         <p:nvSpPr>
@@ -4757,6 +4801,10 @@
             <a:prstDash val="solid"/>
           </a:ln>
         </p:spPr>
+        <p:txBody>
+          <a:bodyPr/>
+          <a:p/>
+        </p:txBody>
       </p:sp>
       <p:sp>
         <p:nvSpPr>
@@ -4823,6 +4871,10 @@
             <a:prstDash val="solid"/>
           </a:ln>
         </p:spPr>
+        <p:txBody>
+          <a:bodyPr/>
+          <a:p/>
+        </p:txBody>
       </p:sp>
       <p:sp>
         <p:nvSpPr>
@@ -4858,6 +4910,23 @@
                 <a:cs typeface="Malgun Gothic" pitchFamily="34" charset="-120"/>
               </a:rPr>
               <a:t>🔬 아키텍처 비교(5종)</a:t>
+            </a:r>
+            <a:endParaRPr lang="en-US" sz="1200" dirty="0"/>
+          </a:p>
+          <a:p>
+            <a:pPr indent="0" marL="0">
+              <a:buNone/>
+            </a:pPr>
+            <a:r>
+              <a:rPr lang="en-US" sz="1200" dirty="0">
+                <a:solidFill>
+                  <a:srgbClr val="22303C"/>
+                </a:solidFill>
+                <a:latin typeface="Malgun Gothic" pitchFamily="34" charset="0"/>
+                <a:ea typeface="Malgun Gothic" pitchFamily="34" charset="-122"/>
+                <a:cs typeface="Malgun Gothic" pitchFamily="34" charset="-120"/>
+              </a:rPr>
+              <a:t>🖼️ CNN 이미지 분류</a:t>
             </a:r>
             <a:endParaRPr lang="en-US" sz="1200" dirty="0"/>
           </a:p>
@@ -6325,6 +6394,10 @@
           </a:solidFill>
           <a:ln/>
         </p:spPr>
+        <p:txBody>
+          <a:bodyPr/>
+          <a:p/>
+        </p:txBody>
       </p:sp>
       <p:sp>
         <p:nvSpPr>
@@ -6476,6 +6549,10 @@
             <a:prstDash val="solid"/>
           </a:ln>
         </p:spPr>
+        <p:txBody>
+          <a:bodyPr/>
+          <a:p/>
+        </p:txBody>
       </p:sp>
       <p:sp>
         <p:nvSpPr>
@@ -6727,6 +6804,10 @@
           </a:solidFill>
           <a:ln/>
         </p:spPr>
+        <p:txBody>
+          <a:bodyPr/>
+          <a:p/>
+        </p:txBody>
       </p:sp>
       <p:sp>
         <p:nvSpPr>
@@ -6867,6 +6948,10 @@
             <a:prstDash val="solid"/>
           </a:ln>
         </p:spPr>
+        <p:txBody>
+          <a:bodyPr/>
+          <a:p/>
+        </p:txBody>
       </p:sp>
       <p:sp>
         <p:nvSpPr>
@@ -6926,7 +7011,7 @@
                 <a:ea typeface="Malgun Gothic" pitchFamily="34" charset="-122"/>
                 <a:cs typeface="Malgun Gothic" pitchFamily="34" charset="-120"/>
               </a:rPr>
-              <a:t>Streamlit 5탭 대시보드 + Cloud 배포로 현장 즉시 활용</a:t>
+              <a:t>Streamlit 6탭 대시보드 + Cloud 배포로 현장 즉시 활용</a:t>
             </a:r>
             <a:endParaRPr lang="en-US" sz="1400" dirty="0"/>
           </a:p>
@@ -7045,6 +7130,10 @@
           </a:solidFill>
           <a:ln/>
         </p:spPr>
+        <p:txBody>
+          <a:bodyPr/>
+          <a:p/>
+        </p:txBody>
       </p:sp>
       <p:sp>
         <p:nvSpPr>
@@ -7185,6 +7274,10 @@
             <a:prstDash val="solid"/>
           </a:ln>
         </p:spPr>
+        <p:txBody>
+          <a:bodyPr/>
+          <a:p/>
+        </p:txBody>
       </p:sp>
       <p:sp>
         <p:nvSpPr>
@@ -7212,6 +7305,10 @@
             <a:prstDash val="solid"/>
           </a:ln>
         </p:spPr>
+        <p:txBody>
+          <a:bodyPr/>
+          <a:p/>
+        </p:txBody>
       </p:sp>
       <p:sp>
         <p:nvSpPr>
@@ -7232,6 +7329,10 @@
           </a:solidFill>
           <a:ln/>
         </p:spPr>
+        <p:txBody>
+          <a:bodyPr/>
+          <a:p/>
+        </p:txBody>
       </p:sp>
       <p:sp>
         <p:nvSpPr>
@@ -7376,6 +7477,10 @@
             <a:prstDash val="solid"/>
           </a:ln>
         </p:spPr>
+        <p:txBody>
+          <a:bodyPr/>
+          <a:p/>
+        </p:txBody>
       </p:sp>
       <p:sp>
         <p:nvSpPr>
@@ -7396,6 +7501,10 @@
           </a:solidFill>
           <a:ln/>
         </p:spPr>
+        <p:txBody>
+          <a:bodyPr/>
+          <a:p/>
+        </p:txBody>
       </p:sp>
       <p:sp>
         <p:nvSpPr>
@@ -7540,6 +7649,10 @@
             <a:prstDash val="solid"/>
           </a:ln>
         </p:spPr>
+        <p:txBody>
+          <a:bodyPr/>
+          <a:p/>
+        </p:txBody>
       </p:sp>
       <p:sp>
         <p:nvSpPr>
@@ -7560,6 +7673,10 @@
           </a:solidFill>
           <a:ln/>
         </p:spPr>
+        <p:txBody>
+          <a:bodyPr/>
+          <a:p/>
+        </p:txBody>
       </p:sp>
       <p:sp>
         <p:nvSpPr>
@@ -7704,6 +7821,10 @@
             <a:prstDash val="solid"/>
           </a:ln>
         </p:spPr>
+        <p:txBody>
+          <a:bodyPr/>
+          <a:p/>
+        </p:txBody>
       </p:sp>
       <p:sp>
         <p:nvSpPr>
@@ -7724,6 +7845,10 @@
           </a:solidFill>
           <a:ln/>
         </p:spPr>
+        <p:txBody>
+          <a:bodyPr/>
+          <a:p/>
+        </p:txBody>
       </p:sp>
       <p:sp>
         <p:nvSpPr>
@@ -7868,6 +7993,10 @@
             <a:prstDash val="solid"/>
           </a:ln>
         </p:spPr>
+        <p:txBody>
+          <a:bodyPr/>
+          <a:p/>
+        </p:txBody>
       </p:sp>
       <p:sp>
         <p:nvSpPr>
@@ -7888,6 +8017,10 @@
           </a:solidFill>
           <a:ln/>
         </p:spPr>
+        <p:txBody>
+          <a:bodyPr/>
+          <a:p/>
+        </p:txBody>
       </p:sp>
       <p:sp>
         <p:nvSpPr>
@@ -8032,6 +8165,10 @@
             <a:prstDash val="solid"/>
           </a:ln>
         </p:spPr>
+        <p:txBody>
+          <a:bodyPr/>
+          <a:p/>
+        </p:txBody>
       </p:sp>
       <p:sp>
         <p:nvSpPr>
@@ -8052,6 +8189,10 @@
           </a:solidFill>
           <a:ln/>
         </p:spPr>
+        <p:txBody>
+          <a:bodyPr/>
+          <a:p/>
+        </p:txBody>
       </p:sp>
       <p:sp>
         <p:nvSpPr>
@@ -8196,6 +8337,10 @@
             <a:prstDash val="solid"/>
           </a:ln>
         </p:spPr>
+        <p:txBody>
+          <a:bodyPr/>
+          <a:p/>
+        </p:txBody>
       </p:sp>
       <p:sp>
         <p:nvSpPr>
@@ -8216,6 +8361,10 @@
           </a:solidFill>
           <a:ln/>
         </p:spPr>
+        <p:txBody>
+          <a:bodyPr/>
+          <a:p/>
+        </p:txBody>
       </p:sp>
       <p:sp>
         <p:nvSpPr>
@@ -8360,6 +8509,10 @@
             <a:prstDash val="solid"/>
           </a:ln>
         </p:spPr>
+        <p:txBody>
+          <a:bodyPr/>
+          <a:p/>
+        </p:txBody>
       </p:sp>
       <p:sp>
         <p:nvSpPr>
@@ -8380,6 +8533,10 @@
           </a:solidFill>
           <a:ln/>
         </p:spPr>
+        <p:txBody>
+          <a:bodyPr/>
+          <a:p/>
+        </p:txBody>
       </p:sp>
       <p:sp>
         <p:nvSpPr>
@@ -8629,6 +8786,10 @@
           </a:solidFill>
           <a:ln/>
         </p:spPr>
+        <p:txBody>
+          <a:bodyPr/>
+          <a:p/>
+        </p:txBody>
       </p:sp>
       <p:sp>
         <p:nvSpPr>
@@ -8769,6 +8930,10 @@
             <a:prstDash val="solid"/>
           </a:ln>
         </p:spPr>
+        <p:txBody>
+          <a:bodyPr/>
+          <a:p/>
+        </p:txBody>
       </p:sp>
       <p:sp>
         <p:nvSpPr>
@@ -8911,7 +9076,7 @@
                 <a:ea typeface="Malgun Gothic" pitchFamily="34" charset="-122"/>
                 <a:cs typeface="Malgun Gothic" pitchFamily="34" charset="-120"/>
               </a:rPr>
-              <a:t>Streamlit 5탭 통합 진단 대시보드</a:t>
+              <a:t>Streamlit 6탭 통합 진단 대시보드</a:t>
             </a:r>
             <a:endParaRPr lang="en-US" sz="1150" dirty="0"/>
           </a:p>
@@ -8943,6 +9108,10 @@
             <a:prstDash val="solid"/>
           </a:ln>
         </p:spPr>
+        <p:txBody>
+          <a:bodyPr/>
+          <a:p/>
+        </p:txBody>
       </p:sp>
       <p:sp>
         <p:nvSpPr>
@@ -10234,6 +10403,10 @@
           </a:solidFill>
           <a:ln/>
         </p:spPr>
+        <p:txBody>
+          <a:bodyPr/>
+          <a:p/>
+        </p:txBody>
       </p:sp>
       <p:sp>
         <p:nvSpPr>
@@ -10374,6 +10547,10 @@
             <a:prstDash val="solid"/>
           </a:ln>
         </p:spPr>
+        <p:txBody>
+          <a:bodyPr/>
+          <a:p/>
+        </p:txBody>
       </p:sp>
       <p:sp>
         <p:nvSpPr>
@@ -13360,6 +13537,10 @@
             <a:prstDash val="solid"/>
           </a:ln>
         </p:spPr>
+        <p:txBody>
+          <a:bodyPr/>
+          <a:p/>
+        </p:txBody>
       </p:sp>
       <p:sp>
         <p:nvSpPr>
@@ -13458,6 +13639,10 @@
           </a:solidFill>
           <a:ln/>
         </p:spPr>
+        <p:txBody>
+          <a:bodyPr/>
+          <a:p/>
+        </p:txBody>
       </p:sp>
       <p:sp>
         <p:nvSpPr>
@@ -13556,6 +13741,10 @@
           </a:solidFill>
           <a:ln/>
         </p:spPr>
+        <p:txBody>
+          <a:bodyPr/>
+          <a:p/>
+        </p:txBody>
       </p:sp>
       <p:sp>
         <p:nvSpPr>
@@ -13654,6 +13843,10 @@
           </a:solidFill>
           <a:ln/>
         </p:spPr>
+        <p:txBody>
+          <a:bodyPr/>
+          <a:p/>
+        </p:txBody>
       </p:sp>
       <p:sp>
         <p:nvSpPr>
@@ -13752,6 +13945,10 @@
           </a:solidFill>
           <a:ln/>
         </p:spPr>
+        <p:txBody>
+          <a:bodyPr/>
+          <a:p/>
+        </p:txBody>
       </p:sp>
       <p:sp>
         <p:nvSpPr>
@@ -13850,6 +14047,10 @@
           </a:solidFill>
           <a:ln/>
         </p:spPr>
+        <p:txBody>
+          <a:bodyPr/>
+          <a:p/>
+        </p:txBody>
       </p:sp>
       <p:sp>
         <p:nvSpPr>
@@ -14021,6 +14222,10 @@
           </a:solidFill>
           <a:ln/>
         </p:spPr>
+        <p:txBody>
+          <a:bodyPr/>
+          <a:p/>
+        </p:txBody>
       </p:sp>
       <p:sp>
         <p:nvSpPr>
@@ -14161,6 +14366,10 @@
             <a:prstDash val="solid"/>
           </a:ln>
         </p:spPr>
+        <p:txBody>
+          <a:bodyPr/>
+          <a:p/>
+        </p:txBody>
       </p:sp>
       <p:sp>
         <p:nvSpPr>
@@ -14188,6 +14397,10 @@
             <a:prstDash val="solid"/>
           </a:ln>
         </p:spPr>
+        <p:txBody>
+          <a:bodyPr/>
+          <a:p/>
+        </p:txBody>
       </p:sp>
       <p:sp>
         <p:nvSpPr>
@@ -14371,6 +14584,10 @@
             <a:prstDash val="solid"/>
           </a:ln>
         </p:spPr>
+        <p:txBody>
+          <a:bodyPr/>
+          <a:p/>
+        </p:txBody>
       </p:sp>
       <p:sp>
         <p:nvSpPr>
@@ -14554,6 +14771,10 @@
             <a:prstDash val="solid"/>
           </a:ln>
         </p:spPr>
+        <p:txBody>
+          <a:bodyPr/>
+          <a:p/>
+        </p:txBody>
       </p:sp>
       <p:sp>
         <p:nvSpPr>
@@ -14737,6 +14958,10 @@
             <a:prstDash val="solid"/>
           </a:ln>
         </p:spPr>
+        <p:txBody>
+          <a:bodyPr/>
+          <a:p/>
+        </p:txBody>
       </p:sp>
       <p:sp>
         <p:nvSpPr>
@@ -14920,6 +15145,10 @@
             <a:prstDash val="solid"/>
           </a:ln>
         </p:spPr>
+        <p:txBody>
+          <a:bodyPr/>
+          <a:p/>
+        </p:txBody>
       </p:sp>
       <p:sp>
         <p:nvSpPr>
@@ -15110,6 +15339,10 @@
             </a:outerShdw>
           </a:effectLst>
         </p:spPr>
+        <p:txBody>
+          <a:bodyPr/>
+          <a:p/>
+        </p:txBody>
       </p:sp>
       <p:sp>
         <p:nvSpPr>
@@ -15144,7 +15377,7 @@
                 <a:ea typeface="Malgun Gothic" pitchFamily="34" charset="-122"/>
                 <a:cs typeface="Malgun Gothic" pitchFamily="34" charset="-120"/>
               </a:rPr>
-              <a:t>[5] BN+LN v2</a:t>
+              <a:t>[5] BatchNorm + LayerNorm v2</a:t>
             </a:r>
             <a:endParaRPr lang="en-US" sz="1150" dirty="0"/>
           </a:p>
@@ -15254,6 +15487,10 @@
             <a:prstDash val="solid"/>
           </a:ln>
         </p:spPr>
+        <p:txBody>
+          <a:bodyPr/>
+          <a:p/>
+        </p:txBody>
       </p:sp>
       <p:sp>
         <p:nvSpPr>
@@ -15478,6 +15715,10 @@
           </a:solidFill>
           <a:ln/>
         </p:spPr>
+        <p:txBody>
+          <a:bodyPr/>
+          <a:p/>
+        </p:txBody>
       </p:sp>
       <p:sp>
         <p:nvSpPr>
@@ -15618,6 +15859,10 @@
             <a:prstDash val="solid"/>
           </a:ln>
         </p:spPr>
+        <p:txBody>
+          <a:bodyPr/>
+          <a:p/>
+        </p:txBody>
       </p:sp>
       <p:sp>
         <p:nvSpPr>
@@ -18796,6 +19041,10 @@
           </a:solidFill>
           <a:ln/>
         </p:spPr>
+        <p:txBody>
+          <a:bodyPr/>
+          <a:p/>
+        </p:txBody>
       </p:sp>
       <p:sp>
         <p:nvSpPr>
@@ -18830,7 +19079,7 @@
                 <a:ea typeface="Malgun Gothic" pitchFamily="34" charset="-122"/>
                 <a:cs typeface="Malgun Gothic" pitchFamily="34" charset="-120"/>
               </a:rPr>
-              <a:t>최종 모델 — GRU v2 (BN+LN)</a:t>
+              <a:t>최종 모델 — GRU v2 (Batch Normalization + Layer Normalization)</a:t>
             </a:r>
             <a:endParaRPr lang="en-US" sz="1300" dirty="0"/>
           </a:p>
@@ -18947,7 +19196,7 @@
                 <a:ea typeface="Malgun Gothic" pitchFamily="34" charset="-122"/>
                 <a:cs typeface="Malgun Gothic" pitchFamily="34" charset="-120"/>
               </a:rPr>
-              <a:t>LayerNorm+BatchNorm → 학습 epoch 54→33 단축, OOS RMSE 16.75% 개선</a:t>
+              <a:t>Layer Normalization + Batch Normalization → 학습 epoch 54→33 단축, OOS RMSE 16.75% 개선</a:t>
             </a:r>
             <a:endParaRPr lang="en-US" sz="1100" dirty="0"/>
           </a:p>
@@ -19531,6 +19780,10 @@
           </a:solidFill>
           <a:ln/>
         </p:spPr>
+        <p:txBody>
+          <a:bodyPr/>
+          <a:p/>
+        </p:txBody>
       </p:sp>
       <p:sp>
         <p:nvSpPr>
@@ -19671,6 +19924,10 @@
             <a:prstDash val="solid"/>
           </a:ln>
         </p:spPr>
+        <p:txBody>
+          <a:bodyPr/>
+          <a:p/>
+        </p:txBody>
       </p:sp>
       <p:graphicFrame>
         <p:nvGraphicFramePr>
@@ -21434,6 +21691,10 @@
           </a:solidFill>
           <a:ln/>
         </p:spPr>
+        <p:txBody>
+          <a:bodyPr/>
+          <a:p/>
+        </p:txBody>
       </p:sp>
       <p:sp>
         <p:nvSpPr>
@@ -21521,7 +21782,7 @@
                 <a:ea typeface="Malgun Gothic" pitchFamily="34" charset="-122"/>
                 <a:cs typeface="Malgun Gothic" pitchFamily="34" charset="-120"/>
               </a:rPr>
-              <a:t>— RF 베이스라인 대비 GRU v2가 OOS RMSE 15.08% 개선 — BN+LN 정규화가 핵심 기여</a:t>
+              <a:t>— RF 베이스라인 대비 GRU v2가 OOS RMSE 15.08% 개선 — Batch Normalization + Layer Normalization 정규화가 핵심 기여</a:t>
             </a:r>
             <a:endParaRPr lang="en-US" sz="1200" dirty="0"/>
           </a:p>
@@ -21546,6 +21807,10 @@
           </a:solidFill>
           <a:ln/>
         </p:spPr>
+        <p:txBody>
+          <a:bodyPr/>
+          <a:p/>
+        </p:txBody>
       </p:sp>
       <p:sp>
         <p:nvSpPr>
@@ -21658,6 +21923,10 @@
           </a:solidFill>
           <a:ln/>
         </p:spPr>
+        <p:txBody>
+          <a:bodyPr/>
+          <a:p/>
+        </p:txBody>
       </p:sp>
       <p:sp>
         <p:nvSpPr>
@@ -21770,6 +22039,10 @@
           </a:solidFill>
           <a:ln/>
         </p:spPr>
+        <p:txBody>
+          <a:bodyPr/>
+          <a:p/>
+        </p:txBody>
       </p:sp>
       <p:sp>
         <p:nvSpPr>
@@ -21994,6 +22267,10 @@
           </a:solidFill>
           <a:ln/>
         </p:spPr>
+        <p:txBody>
+          <a:bodyPr/>
+          <a:p/>
+        </p:txBody>
       </p:sp>
       <p:sp>
         <p:nvSpPr>
@@ -22134,6 +22411,10 @@
             <a:prstDash val="solid"/>
           </a:ln>
         </p:spPr>
+        <p:txBody>
+          <a:bodyPr/>
+          <a:p/>
+        </p:txBody>
       </p:sp>
       <p:sp>
         <p:nvSpPr>
@@ -22161,6 +22442,10 @@
             <a:prstDash val="solid"/>
           </a:ln>
         </p:spPr>
+        <p:txBody>
+          <a:bodyPr/>
+          <a:p/>
+        </p:txBody>
       </p:sp>
       <p:sp>
         <p:nvSpPr>
@@ -23954,6 +24239,10 @@
             <a:prstDash val="solid"/>
           </a:ln>
         </p:spPr>
+        <p:txBody>
+          <a:bodyPr/>
+          <a:p/>
+        </p:txBody>
       </p:sp>
       <p:sp>
         <p:nvSpPr>

--- a/Homework/DL_FactoryAutomation/산출물/딥러닝_FEMTO_RUL_발표자료_v2.pptx
+++ b/Homework/DL_FactoryAutomation/산출물/딥러닝_FEMTO_RUL_발표자료_v2.pptx
@@ -17,6 +17,7 @@
     <p:sldId id="264" r:id="rId10"/>
     <p:sldId id="265" r:id="rId11"/>
     <p:sldId id="266" r:id="rId12"/>
+    <p:sldId id="268" r:id="rId19"/>
   </p:sldIdLst>
   <p:notesMasterIdLst>
     <p:notesMasterId r:id="rId13"/>
@@ -7085,6 +7086,716 @@
 </p:sld>
 </file>
 
+<file path=ppt/slides/slide13.xml><?xml version="1.0" encoding="utf-8"?>
+<p:sld xmlns:a="http://schemas.openxmlformats.org/drawingml/2006/main" xmlns:p="http://schemas.openxmlformats.org/presentationml/2006/main" xmlns:r="http://schemas.openxmlformats.org/officeDocument/2006/relationships">
+  <p:cSld>
+    <p:spTree>
+      <p:sp>
+        <p:nvSpPr>
+          <p:cNvPr id="1" name="TextBox 0"/>
+          <p:cNvSpPr txBox="1"/>
+          <p:nvPr/>
+        </p:nvSpPr>
+        <p:spPr>
+          <a:xfrm>
+            <a:off x="274320" y="274320"/>
+            <a:ext cx="11643360" cy="640080"/>
+          </a:xfrm>
+          <a:prstGeom prst="rect">
+            <a:avLst/>
+          </a:prstGeom>
+          <a:noFill/>
+        </p:spPr>
+        <p:txBody>
+          <a:bodyPr wrap="square">
+            <a:spAutoFit/>
+          </a:bodyPr>
+          <a:lstStyle/>
+          <a:p>
+            <a:pPr algn="ctr"/>
+            <a:r>
+              <a:rPr sz="2400" b="1">
+                <a:solidFill>
+                  <a:srgbClr val="1A4A7A"/>
+                </a:solidFill>
+              </a:rPr>
+              <a:t>ML + DL + Grad-CAM 통합 진단 파이프라인</a:t>
+            </a:r>
+          </a:p>
+        </p:txBody>
+      </p:sp>
+      <p:sp>
+        <p:nvSpPr>
+          <p:cNvPr id="2" name="TextBox 1"/>
+          <p:cNvSpPr txBox="1"/>
+          <p:nvPr/>
+        </p:nvSpPr>
+        <p:spPr>
+          <a:xfrm>
+            <a:off x="274320" y="868680"/>
+            <a:ext cx="11643360" cy="365760"/>
+          </a:xfrm>
+          <a:prstGeom prst="rect">
+            <a:avLst/>
+          </a:prstGeom>
+          <a:noFill/>
+        </p:spPr>
+        <p:txBody>
+          <a:bodyPr wrap="square">
+            <a:spAutoFit/>
+          </a:bodyPr>
+          <a:lstStyle/>
+          <a:p>
+            <a:pPr algn="ctr"/>
+            <a:r>
+              <a:rPr sz="1300" b="0">
+                <a:solidFill>
+                  <a:srgbClr val="555555"/>
+                </a:solidFill>
+              </a:rPr>
+              <a:t>FEMTO-ST 베어링 이상탐지 · RUL 예측 · 고장 시각화 3단계 완성</a:t>
+            </a:r>
+          </a:p>
+        </p:txBody>
+      </p:sp>
+      <p:sp>
+        <p:nvSpPr>
+          <p:cNvPr id="99" name="rect"/>
+          <p:cNvSpPr/>
+          <p:nvPr/>
+        </p:nvSpPr>
+        <p:spPr>
+          <a:xfrm>
+            <a:off x="274320" y="1325880"/>
+            <a:ext cx="3698240" cy="457200"/>
+          </a:xfrm>
+          <a:prstGeom prst="rect">
+            <a:avLst/>
+          </a:prstGeom>
+          <a:solidFill>
+            <a:srgbClr val="1A4A7A"/>
+          </a:solidFill>
+        </p:spPr>
+        <p:txBody/>
+      </p:sp>
+      <p:sp>
+        <p:nvSpPr>
+          <p:cNvPr id="100" name="TextBox 99"/>
+          <p:cNvSpPr txBox="1"/>
+          <p:nvPr/>
+        </p:nvSpPr>
+        <p:spPr>
+          <a:xfrm>
+            <a:off x="274320" y="1325880"/>
+            <a:ext cx="3698240" cy="457200"/>
+          </a:xfrm>
+          <a:prstGeom prst="rect">
+            <a:avLst/>
+          </a:prstGeom>
+          <a:noFill/>
+        </p:spPr>
+        <p:txBody>
+          <a:bodyPr wrap="square">
+            <a:spAutoFit/>
+          </a:bodyPr>
+          <a:lstStyle/>
+          <a:p>
+            <a:pPr algn="ctr"/>
+            <a:r>
+              <a:rPr sz="1400" b="1">
+                <a:solidFill>
+                  <a:srgbClr val="FFFFFF"/>
+                </a:solidFill>
+              </a:rPr>
+              <a:t>① ML 단계</a:t>
+            </a:r>
+          </a:p>
+        </p:txBody>
+      </p:sp>
+      <p:sp>
+        <p:nvSpPr>
+          <p:cNvPr id="99" name="rect"/>
+          <p:cNvSpPr/>
+          <p:nvPr/>
+        </p:nvSpPr>
+        <p:spPr>
+          <a:xfrm>
+            <a:off x="274320" y="1783080"/>
+            <a:ext cx="3698240" cy="411480"/>
+          </a:xfrm>
+          <a:prstGeom prst="rect">
+            <a:avLst/>
+          </a:prstGeom>
+          <a:solidFill>
+            <a:srgbClr val="1A4A7A"/>
+          </a:solidFill>
+        </p:spPr>
+        <p:txBody/>
+      </p:sp>
+      <p:sp>
+        <p:nvSpPr>
+          <p:cNvPr id="101" name="TextBox 100"/>
+          <p:cNvSpPr txBox="1"/>
+          <p:nvPr/>
+        </p:nvSpPr>
+        <p:spPr>
+          <a:xfrm>
+            <a:off x="274320" y="1783080"/>
+            <a:ext cx="3698240" cy="411480"/>
+          </a:xfrm>
+          <a:prstGeom prst="rect">
+            <a:avLst/>
+          </a:prstGeom>
+          <a:noFill/>
+        </p:spPr>
+        <p:txBody>
+          <a:bodyPr wrap="square">
+            <a:spAutoFit/>
+          </a:bodyPr>
+          <a:lstStyle/>
+          <a:p>
+            <a:pPr algn="ctr"/>
+            <a:r>
+              <a:rPr sz="1200" b="1">
+                <a:solidFill>
+                  <a:srgbClr val="FFFFFF"/>
+                </a:solidFill>
+              </a:rPr>
+              <a:t>정상 / 열화 분류</a:t>
+            </a:r>
+          </a:p>
+        </p:txBody>
+      </p:sp>
+      <p:sp>
+        <p:nvSpPr>
+          <p:cNvPr id="99" name="rect"/>
+          <p:cNvSpPr/>
+          <p:nvPr/>
+        </p:nvSpPr>
+        <p:spPr>
+          <a:xfrm>
+            <a:off x="274320" y="2194560"/>
+            <a:ext cx="3698240" cy="3337560"/>
+          </a:xfrm>
+          <a:prstGeom prst="rect">
+            <a:avLst/>
+          </a:prstGeom>
+          <a:solidFill>
+            <a:srgbClr val="E8F0FE"/>
+          </a:solidFill>
+        </p:spPr>
+        <p:txBody/>
+      </p:sp>
+      <p:sp>
+        <p:nvSpPr>
+          <p:cNvPr id="102" name="TextBox 101"/>
+          <p:cNvSpPr txBox="1"/>
+          <p:nvPr/>
+        </p:nvSpPr>
+        <p:spPr>
+          <a:xfrm>
+            <a:off x="347472" y="2240280"/>
+            <a:ext cx="3588512" cy="3200400"/>
+          </a:xfrm>
+          <a:prstGeom prst="rect">
+            <a:avLst/>
+          </a:prstGeom>
+          <a:noFill/>
+        </p:spPr>
+        <p:txBody>
+          <a:bodyPr wrap="square">
+            <a:spAutoFit/>
+          </a:bodyPr>
+          <a:lstStyle/>
+          <a:p>
+            <a:pPr algn="l"/>
+            <a:r>
+              <a:rPr sz="1100" b="0">
+                <a:solidFill>
+                  <a:srgbClr val="222222"/>
+                </a:solidFill>
+              </a:rPr>
+              <a:t>▸ 알고리즘: RandomForest · XGBoost</a:t>
+            </a:r>
+          </a:p>
+          <a:p>
+            <a:pPr algn="l"/>
+            <a:r>
+              <a:rPr sz="1100" b="0">
+                <a:solidFill>
+                  <a:srgbClr val="222222"/>
+                </a:solidFill>
+              </a:rPr>
+              <a:t>▸ 입력: 진동 RMS · 첨도 · 크레스트 인자</a:t>
+            </a:r>
+          </a:p>
+          <a:p>
+            <a:pPr algn="l"/>
+            <a:r>
+              <a:rPr sz="1100" b="0">
+                <a:solidFill>
+                  <a:srgbClr val="222222"/>
+                </a:solidFill>
+              </a:rPr>
+              <a:t>▸ 출력: 열화 확률(%) · 임계값 기반 판정</a:t>
+            </a:r>
+          </a:p>
+          <a:p>
+            <a:pPr algn="l"/>
+            <a:r>
+              <a:rPr sz="1100" b="0">
+                <a:solidFill>
+                  <a:srgbClr val="222222"/>
+                </a:solidFill>
+              </a:rPr>
+              <a:t>▸ 역할: '지금 이상이 있는가?' 1차 경보</a:t>
+            </a:r>
+          </a:p>
+        </p:txBody>
+      </p:sp>
+      <p:sp>
+        <p:nvSpPr>
+          <p:cNvPr id="99" name="rect"/>
+          <p:cNvSpPr/>
+          <p:nvPr/>
+        </p:nvSpPr>
+        <p:spPr>
+          <a:xfrm>
+            <a:off x="4246880" y="1325880"/>
+            <a:ext cx="3698240" cy="457200"/>
+          </a:xfrm>
+          <a:prstGeom prst="rect">
+            <a:avLst/>
+          </a:prstGeom>
+          <a:solidFill>
+            <a:srgbClr val="0A6A2A"/>
+          </a:solidFill>
+        </p:spPr>
+        <p:txBody/>
+      </p:sp>
+      <p:sp>
+        <p:nvSpPr>
+          <p:cNvPr id="103" name="TextBox 102"/>
+          <p:cNvSpPr txBox="1"/>
+          <p:nvPr/>
+        </p:nvSpPr>
+        <p:spPr>
+          <a:xfrm>
+            <a:off x="4246880" y="1325880"/>
+            <a:ext cx="3698240" cy="457200"/>
+          </a:xfrm>
+          <a:prstGeom prst="rect">
+            <a:avLst/>
+          </a:prstGeom>
+          <a:noFill/>
+        </p:spPr>
+        <p:txBody>
+          <a:bodyPr wrap="square">
+            <a:spAutoFit/>
+          </a:bodyPr>
+          <a:lstStyle/>
+          <a:p>
+            <a:pPr algn="ctr"/>
+            <a:r>
+              <a:rPr sz="1400" b="1">
+                <a:solidFill>
+                  <a:srgbClr val="FFFFFF"/>
+                </a:solidFill>
+              </a:rPr>
+              <a:t>② DL 단계</a:t>
+            </a:r>
+          </a:p>
+        </p:txBody>
+      </p:sp>
+      <p:sp>
+        <p:nvSpPr>
+          <p:cNvPr id="99" name="rect"/>
+          <p:cNvSpPr/>
+          <p:nvPr/>
+        </p:nvSpPr>
+        <p:spPr>
+          <a:xfrm>
+            <a:off x="4246880" y="1783080"/>
+            <a:ext cx="3698240" cy="411480"/>
+          </a:xfrm>
+          <a:prstGeom prst="rect">
+            <a:avLst/>
+          </a:prstGeom>
+          <a:solidFill>
+            <a:srgbClr val="0A6A2A"/>
+          </a:solidFill>
+        </p:spPr>
+        <p:txBody/>
+      </p:sp>
+      <p:sp>
+        <p:nvSpPr>
+          <p:cNvPr id="104" name="TextBox 103"/>
+          <p:cNvSpPr txBox="1"/>
+          <p:nvPr/>
+        </p:nvSpPr>
+        <p:spPr>
+          <a:xfrm>
+            <a:off x="4246880" y="1783080"/>
+            <a:ext cx="3698240" cy="411480"/>
+          </a:xfrm>
+          <a:prstGeom prst="rect">
+            <a:avLst/>
+          </a:prstGeom>
+          <a:noFill/>
+        </p:spPr>
+        <p:txBody>
+          <a:bodyPr wrap="square">
+            <a:spAutoFit/>
+          </a:bodyPr>
+          <a:lstStyle/>
+          <a:p>
+            <a:pPr algn="ctr"/>
+            <a:r>
+              <a:rPr sz="1200" b="1">
+                <a:solidFill>
+                  <a:srgbClr val="FFFFFF"/>
+                </a:solidFill>
+              </a:rPr>
+              <a:t>잔여수명(RUL) 정밀 예측</a:t>
+            </a:r>
+          </a:p>
+        </p:txBody>
+      </p:sp>
+      <p:sp>
+        <p:nvSpPr>
+          <p:cNvPr id="99" name="rect"/>
+          <p:cNvSpPr/>
+          <p:nvPr/>
+        </p:nvSpPr>
+        <p:spPr>
+          <a:xfrm>
+            <a:off x="4246880" y="2194560"/>
+            <a:ext cx="3698240" cy="3337560"/>
+          </a:xfrm>
+          <a:prstGeom prst="rect">
+            <a:avLst/>
+          </a:prstGeom>
+          <a:solidFill>
+            <a:srgbClr val="E6F7E9"/>
+          </a:solidFill>
+        </p:spPr>
+        <p:txBody/>
+      </p:sp>
+      <p:sp>
+        <p:nvSpPr>
+          <p:cNvPr id="105" name="TextBox 104"/>
+          <p:cNvSpPr txBox="1"/>
+          <p:nvPr/>
+        </p:nvSpPr>
+        <p:spPr>
+          <a:xfrm>
+            <a:off x="4320032" y="2240280"/>
+            <a:ext cx="3588512" cy="3200400"/>
+          </a:xfrm>
+          <a:prstGeom prst="rect">
+            <a:avLst/>
+          </a:prstGeom>
+          <a:noFill/>
+        </p:spPr>
+        <p:txBody>
+          <a:bodyPr wrap="square">
+            <a:spAutoFit/>
+          </a:bodyPr>
+          <a:lstStyle/>
+          <a:p>
+            <a:pPr algn="l"/>
+            <a:r>
+              <a:rPr sz="1100" b="0">
+                <a:solidFill>
+                  <a:srgbClr val="222222"/>
+                </a:solidFill>
+              </a:rPr>
+              <a:t>▸ 알고리즘: GRU v2 (Batch Norm + Layer Norm)</a:t>
+            </a:r>
+          </a:p>
+          <a:p>
+            <a:pPr algn="l"/>
+            <a:r>
+              <a:rPr sz="1100" b="0">
+                <a:solidFill>
+                  <a:srgbClr val="222222"/>
+                </a:solidFill>
+              </a:rPr>
+              <a:t>▸ 입력: 진동 시계열 시퀀스</a:t>
+            </a:r>
+          </a:p>
+          <a:p>
+            <a:pPr algn="l"/>
+            <a:r>
+              <a:rPr sz="1100" b="0">
+                <a:solidFill>
+                  <a:srgbClr val="222222"/>
+                </a:solidFill>
+              </a:rPr>
+              <a:t>▸ 출력: 잔여 가동 시간(분) 예측값</a:t>
+            </a:r>
+          </a:p>
+          <a:p>
+            <a:pPr algn="l"/>
+            <a:r>
+              <a:rPr sz="1100" b="0">
+                <a:solidFill>
+                  <a:srgbClr val="222222"/>
+                </a:solidFill>
+              </a:rPr>
+              <a:t>▸ 역할: '언제 교체해야 하는가?' 정밀 예측</a:t>
+            </a:r>
+          </a:p>
+        </p:txBody>
+      </p:sp>
+      <p:sp>
+        <p:nvSpPr>
+          <p:cNvPr id="99" name="rect"/>
+          <p:cNvSpPr/>
+          <p:nvPr/>
+        </p:nvSpPr>
+        <p:spPr>
+          <a:xfrm>
+            <a:off x="8219440" y="1325880"/>
+            <a:ext cx="3698240" cy="457200"/>
+          </a:xfrm>
+          <a:prstGeom prst="rect">
+            <a:avLst/>
+          </a:prstGeom>
+          <a:solidFill>
+            <a:srgbClr val="8B0000"/>
+          </a:solidFill>
+        </p:spPr>
+        <p:txBody/>
+      </p:sp>
+      <p:sp>
+        <p:nvSpPr>
+          <p:cNvPr id="106" name="TextBox 105"/>
+          <p:cNvSpPr txBox="1"/>
+          <p:nvPr/>
+        </p:nvSpPr>
+        <p:spPr>
+          <a:xfrm>
+            <a:off x="8219440" y="1325880"/>
+            <a:ext cx="3698240" cy="457200"/>
+          </a:xfrm>
+          <a:prstGeom prst="rect">
+            <a:avLst/>
+          </a:prstGeom>
+          <a:noFill/>
+        </p:spPr>
+        <p:txBody>
+          <a:bodyPr wrap="square">
+            <a:spAutoFit/>
+          </a:bodyPr>
+          <a:lstStyle/>
+          <a:p>
+            <a:pPr algn="ctr"/>
+            <a:r>
+              <a:rPr sz="1400" b="1">
+                <a:solidFill>
+                  <a:srgbClr val="FFFFFF"/>
+                </a:solidFill>
+              </a:rPr>
+              <a:t>③ CNN + Grad-CAM</a:t>
+            </a:r>
+          </a:p>
+        </p:txBody>
+      </p:sp>
+      <p:sp>
+        <p:nvSpPr>
+          <p:cNvPr id="99" name="rect"/>
+          <p:cNvSpPr/>
+          <p:nvPr/>
+        </p:nvSpPr>
+        <p:spPr>
+          <a:xfrm>
+            <a:off x="8219440" y="1783080"/>
+            <a:ext cx="3698240" cy="411480"/>
+          </a:xfrm>
+          <a:prstGeom prst="rect">
+            <a:avLst/>
+          </a:prstGeom>
+          <a:solidFill>
+            <a:srgbClr val="8B0000"/>
+          </a:solidFill>
+        </p:spPr>
+        <p:txBody/>
+      </p:sp>
+      <p:sp>
+        <p:nvSpPr>
+          <p:cNvPr id="107" name="TextBox 106"/>
+          <p:cNvSpPr txBox="1"/>
+          <p:nvPr/>
+        </p:nvSpPr>
+        <p:spPr>
+          <a:xfrm>
+            <a:off x="8219440" y="1783080"/>
+            <a:ext cx="3698240" cy="411480"/>
+          </a:xfrm>
+          <a:prstGeom prst="rect">
+            <a:avLst/>
+          </a:prstGeom>
+          <a:noFill/>
+        </p:spPr>
+        <p:txBody>
+          <a:bodyPr wrap="square">
+            <a:spAutoFit/>
+          </a:bodyPr>
+          <a:lstStyle/>
+          <a:p>
+            <a:pPr algn="ctr"/>
+            <a:r>
+              <a:rPr sz="1200" b="1">
+                <a:solidFill>
+                  <a:srgbClr val="FFFFFF"/>
+                </a:solidFill>
+              </a:rPr>
+              <a:t>고장 부위·시점 시각화</a:t>
+            </a:r>
+          </a:p>
+        </p:txBody>
+      </p:sp>
+      <p:sp>
+        <p:nvSpPr>
+          <p:cNvPr id="99" name="rect"/>
+          <p:cNvSpPr/>
+          <p:nvPr/>
+        </p:nvSpPr>
+        <p:spPr>
+          <a:xfrm>
+            <a:off x="8219440" y="2194560"/>
+            <a:ext cx="3698240" cy="3337560"/>
+          </a:xfrm>
+          <a:prstGeom prst="rect">
+            <a:avLst/>
+          </a:prstGeom>
+          <a:solidFill>
+            <a:srgbClr val="FDEDED"/>
+          </a:solidFill>
+        </p:spPr>
+        <p:txBody/>
+      </p:sp>
+      <p:sp>
+        <p:nvSpPr>
+          <p:cNvPr id="108" name="TextBox 107"/>
+          <p:cNvSpPr txBox="1"/>
+          <p:nvPr/>
+        </p:nvSpPr>
+        <p:spPr>
+          <a:xfrm>
+            <a:off x="8292592" y="2240280"/>
+            <a:ext cx="3588512" cy="3200400"/>
+          </a:xfrm>
+          <a:prstGeom prst="rect">
+            <a:avLst/>
+          </a:prstGeom>
+          <a:noFill/>
+        </p:spPr>
+        <p:txBody>
+          <a:bodyPr wrap="square">
+            <a:spAutoFit/>
+          </a:bodyPr>
+          <a:lstStyle/>
+          <a:p>
+            <a:pPr algn="l"/>
+            <a:r>
+              <a:rPr sz="1100" b="0">
+                <a:solidFill>
+                  <a:srgbClr val="222222"/>
+                </a:solidFill>
+              </a:rPr>
+              <a:t>▸ 알고리즘: CNN (Conv2D × 3 레이어)</a:t>
+            </a:r>
+          </a:p>
+          <a:p>
+            <a:pPr algn="l"/>
+            <a:r>
+              <a:rPr sz="1100" b="0">
+                <a:solidFill>
+                  <a:srgbClr val="222222"/>
+                </a:solidFill>
+              </a:rPr>
+              <a:t>▸ 입력: 진동 신호 → matplotlib 이미지 변환</a:t>
+            </a:r>
+          </a:p>
+          <a:p>
+            <a:pPr algn="l"/>
+            <a:r>
+              <a:rPr sz="1100" b="0">
+                <a:solidFill>
+                  <a:srgbClr val="222222"/>
+                </a:solidFill>
+              </a:rPr>
+              <a:t>▸ Grad-CAM: 마지막 Conv 기울기 역전파</a:t>
+            </a:r>
+          </a:p>
+          <a:p>
+            <a:pPr algn="l"/>
+            <a:r>
+              <a:rPr sz="1100" b="0">
+                <a:solidFill>
+                  <a:srgbClr val="222222"/>
+                </a:solidFill>
+              </a:rPr>
+              <a:t>  → 히트맵으로 '어느 시점이 위험했나' 표시</a:t>
+            </a:r>
+          </a:p>
+          <a:p>
+            <a:pPr algn="l"/>
+            <a:r>
+              <a:rPr sz="1100" b="0">
+                <a:solidFill>
+                  <a:srgbClr val="222222"/>
+                </a:solidFill>
+              </a:rPr>
+              <a:t>▸ 역할: XAI — CNN 판정 근거 시각화</a:t>
+            </a:r>
+          </a:p>
+        </p:txBody>
+      </p:sp>
+      <p:sp>
+        <p:nvSpPr>
+          <p:cNvPr id="109" name="TextBox 108"/>
+          <p:cNvSpPr txBox="1"/>
+          <p:nvPr/>
+        </p:nvSpPr>
+        <p:spPr>
+          <a:xfrm>
+            <a:off x="274320" y="5669280"/>
+            <a:ext cx="11643360" cy="411480"/>
+          </a:xfrm>
+          <a:prstGeom prst="rect">
+            <a:avLst/>
+          </a:prstGeom>
+          <a:noFill/>
+        </p:spPr>
+        <p:txBody>
+          <a:bodyPr wrap="square">
+            <a:spAutoFit/>
+          </a:bodyPr>
+          <a:lstStyle/>
+          <a:p>
+            <a:pPr algn="ctr"/>
+            <a:r>
+              <a:rPr sz="1200" b="1">
+                <a:solidFill>
+                  <a:srgbClr val="333333"/>
+                </a:solidFill>
+              </a:rPr>
+              <a:t>① ML 이상 탐지   →   ② DL 잔여수명 예측   →   ③ CNN + Grad-CAM 시각화   →   정비 의사결정 지원</a:t>
+            </a:r>
+          </a:p>
+        </p:txBody>
+      </p:sp>
+    </p:spTree>
+  </p:cSld>
+  <p:clrMapOvr>
+    <a:masterClrMapping/>
+  </p:clrMapOvr>
+</p:sld>
+</file>
+
 <file path=ppt/slides/slide2.xml><?xml version="1.0" encoding="utf-8"?>
 <p:sld xmlns:a="http://schemas.openxmlformats.org/drawingml/2006/main" xmlns:r="http://schemas.openxmlformats.org/officeDocument/2006/relationships" xmlns:p="http://schemas.openxmlformats.org/presentationml/2006/main">
   <p:cSld name="Slide 2">

--- a/Homework/DL_FactoryAutomation/산출물/딥러닝_FEMTO_RUL_발표자료_v2.pptx
+++ b/Homework/DL_FactoryAutomation/산출물/딥러닝_FEMTO_RUL_발표자료_v2.pptx
@@ -7,6 +7,7 @@
   <p:sldIdLst>
     <p:sldId id="256" r:id="rId2"/>
     <p:sldId id="257" r:id="rId3"/>
+    <p:sldId id="269" r:id="rId20"/>
     <p:sldId id="258" r:id="rId4"/>
     <p:sldId id="259" r:id="rId5"/>
     <p:sldId id="260" r:id="rId6"/>
@@ -7796,6 +7797,502 @@
 </p:sld>
 </file>
 
+<file path=ppt/slides/slide14.xml><?xml version="1.0" encoding="utf-8"?>
+<p:sld xmlns:a="http://schemas.openxmlformats.org/drawingml/2006/main" xmlns:p="http://schemas.openxmlformats.org/presentationml/2006/main" xmlns:r="http://schemas.openxmlformats.org/officeDocument/2006/relationships">
+  <p:cSld>
+    <p:spTree>
+      <p:nvGrpSpPr>
+        <p:cNvPr id="1" name=""/>
+        <p:cNvGrpSpPr/>
+        <p:nvPr/>
+      </p:nvGrpSpPr>
+      <p:grpSpPr/>
+      <p:sp>
+        <p:nvSpPr>
+          <p:cNvPr id="2" name="TextBox 1"/>
+          <p:cNvSpPr txBox="1"/>
+          <p:nvPr/>
+        </p:nvSpPr>
+        <p:spPr>
+          <a:xfrm>
+            <a:off x="365760" y="137160"/>
+            <a:ext cx="8412480" cy="640080"/>
+          </a:xfrm>
+          <a:prstGeom prst="rect">
+            <a:avLst/>
+          </a:prstGeom>
+          <a:noFill/>
+        </p:spPr>
+        <p:txBody>
+          <a:bodyPr wrap="none">
+            <a:spAutoFit/>
+          </a:bodyPr>
+          <a:lstStyle/>
+          <a:p>
+            <a:pPr>
+              <a:defRPr sz="2000" b="1">
+                <a:solidFill>
+                  <a:srgbClr val="1F497D"/>
+                </a:solidFill>
+              </a:defRPr>
+            </a:pPr>
+            <a:r>
+              <a:t>Q1. 실제 현장에서 무엇을 더 많이 쓰나?  ─  데이터 유형 비교</a:t>
+            </a:r>
+          </a:p>
+        </p:txBody>
+      </p:sp>
+      <p:graphicFrame>
+        <p:nvGraphicFramePr>
+          <p:cNvPr id="3" name="Table 2"/>
+          <p:cNvGraphicFramePr>
+            <a:graphicFrameLocks noGrp="1"/>
+          </p:cNvGraphicFramePr>
+          <p:nvPr/>
+        </p:nvGraphicFramePr>
+        <p:xfrm>
+          <a:off x="365760" y="868680"/>
+          <a:ext cx="8412480" cy="3017520"/>
+        </p:xfrm>
+        <a:graphic>
+          <a:graphicData uri="http://schemas.openxmlformats.org/drawingml/2006/table">
+            <a:tbl>
+              <a:tblPr firstRow="1" bandRow="1">
+                <a:tableStyleId>{5C22544A-7EE6-4342-B048-85BDC9FD1C3A}</a:tableStyleId>
+              </a:tblPr>
+              <a:tblGrid>
+                <a:gridCol w="2651760"/>
+                <a:gridCol w="2880360"/>
+                <a:gridCol w="2880360"/>
+              </a:tblGrid>
+              <a:tr h="502920">
+                <a:tc>
+                  <a:txBody>
+                    <a:bodyPr/>
+                    <a:lstStyle/>
+                    <a:p>
+                      <a:pPr algn="ctr">
+                        <a:defRPr sz="1100" b="1">
+                          <a:solidFill>
+                            <a:srgbClr val="FFFFFF"/>
+                          </a:solidFill>
+                        </a:defRPr>
+                      </a:pPr>
+                      <a:r>
+                        <a:t>비교 항목</a:t>
+                      </a:r>
+                    </a:p>
+                  </a:txBody>
+                  <a:tcPr>
+                    <a:solidFill>
+                      <a:srgbClr val="1F497D"/>
+                    </a:solidFill>
+                  </a:tcPr>
+                </a:tc>
+                <a:tc>
+                  <a:txBody>
+                    <a:bodyPr/>
+                    <a:lstStyle/>
+                    <a:p>
+                      <a:pPr algn="ctr">
+                        <a:defRPr sz="1100" b="1">
+                          <a:solidFill>
+                            <a:srgbClr val="FFFFFF"/>
+                          </a:solidFill>
+                        </a:defRPr>
+                      </a:pPr>
+                      <a:r>
+                        <a:t>진동 시계열 (현재 방식)</a:t>
+                      </a:r>
+                    </a:p>
+                  </a:txBody>
+                  <a:tcPr>
+                    <a:solidFill>
+                      <a:srgbClr val="1F497D"/>
+                    </a:solidFill>
+                  </a:tcPr>
+                </a:tc>
+                <a:tc>
+                  <a:txBody>
+                    <a:bodyPr/>
+                    <a:lstStyle/>
+                    <a:p>
+                      <a:pPr algn="ctr">
+                        <a:defRPr sz="1100" b="1">
+                          <a:solidFill>
+                            <a:srgbClr val="FFFFFF"/>
+                          </a:solidFill>
+                        </a:defRPr>
+                      </a:pPr>
+                      <a:r>
+                        <a:t>실제 베어링 사진</a:t>
+                      </a:r>
+                    </a:p>
+                  </a:txBody>
+                  <a:tcPr>
+                    <a:solidFill>
+                      <a:srgbClr val="1F497D"/>
+                    </a:solidFill>
+                  </a:tcPr>
+                </a:tc>
+              </a:tr>
+              <a:tr h="502920">
+                <a:tc>
+                  <a:txBody>
+                    <a:bodyPr/>
+                    <a:lstStyle/>
+                    <a:p>
+                      <a:pPr algn="ctr">
+                        <a:defRPr sz="1100"/>
+                      </a:pPr>
+                      <a:r>
+                        <a:t>현장 적용</a:t>
+                      </a:r>
+                    </a:p>
+                  </a:txBody>
+                  <a:tcPr/>
+                </a:tc>
+                <a:tc>
+                  <a:txBody>
+                    <a:bodyPr/>
+                    <a:lstStyle/>
+                    <a:p>
+                      <a:pPr algn="ctr">
+                        <a:defRPr sz="1100"/>
+                      </a:pPr>
+                      <a:r>
+                        <a:t>✅ 업계 표준 (ISO 10816/20816)</a:t>
+                      </a:r>
+                    </a:p>
+                  </a:txBody>
+                  <a:tcPr>
+                    <a:solidFill>
+                      <a:srgbClr val="D6E4F0"/>
+                    </a:solidFill>
+                  </a:tcPr>
+                </a:tc>
+                <a:tc>
+                  <a:txBody>
+                    <a:bodyPr/>
+                    <a:lstStyle/>
+                    <a:p>
+                      <a:pPr algn="ctr">
+                        <a:defRPr sz="1100"/>
+                      </a:pPr>
+                      <a:r>
+                        <a:t>🔶 분해 후 사후검사 위주</a:t>
+                      </a:r>
+                    </a:p>
+                  </a:txBody>
+                  <a:tcPr>
+                    <a:solidFill>
+                      <a:srgbClr val="EBF5EB"/>
+                    </a:solidFill>
+                  </a:tcPr>
+                </a:tc>
+              </a:tr>
+              <a:tr h="502920">
+                <a:tc>
+                  <a:txBody>
+                    <a:bodyPr/>
+                    <a:lstStyle/>
+                    <a:p>
+                      <a:pPr algn="ctr">
+                        <a:defRPr sz="1100"/>
+                      </a:pPr>
+                      <a:r>
+                        <a:t>비용</a:t>
+                      </a:r>
+                    </a:p>
+                  </a:txBody>
+                  <a:tcPr/>
+                </a:tc>
+                <a:tc>
+                  <a:txBody>
+                    <a:bodyPr/>
+                    <a:lstStyle/>
+                    <a:p>
+                      <a:pPr algn="ctr">
+                        <a:defRPr sz="1100"/>
+                      </a:pPr>
+                      <a:r>
+                        <a:t>✅ 저렴 (가속도계 수천 원)</a:t>
+                      </a:r>
+                    </a:p>
+                  </a:txBody>
+                  <a:tcPr>
+                    <a:solidFill>
+                      <a:srgbClr val="D6E4F0"/>
+                    </a:solidFill>
+                  </a:tcPr>
+                </a:tc>
+                <a:tc>
+                  <a:txBody>
+                    <a:bodyPr/>
+                    <a:lstStyle/>
+                    <a:p>
+                      <a:pPr algn="ctr">
+                        <a:defRPr sz="1100"/>
+                      </a:pPr>
+                      <a:r>
+                        <a:t>🔶 고가 카메라·조명 인프라</a:t>
+                      </a:r>
+                    </a:p>
+                  </a:txBody>
+                  <a:tcPr>
+                    <a:solidFill>
+                      <a:srgbClr val="EBF5EB"/>
+                    </a:solidFill>
+                  </a:tcPr>
+                </a:tc>
+              </a:tr>
+              <a:tr h="502920">
+                <a:tc>
+                  <a:txBody>
+                    <a:bodyPr/>
+                    <a:lstStyle/>
+                    <a:p>
+                      <a:pPr algn="ctr">
+                        <a:defRPr sz="1100"/>
+                      </a:pPr>
+                      <a:r>
+                        <a:t>실시간 모니터링</a:t>
+                      </a:r>
+                    </a:p>
+                  </a:txBody>
+                  <a:tcPr/>
+                </a:tc>
+                <a:tc>
+                  <a:txBody>
+                    <a:bodyPr/>
+                    <a:lstStyle/>
+                    <a:p>
+                      <a:pPr algn="ctr">
+                        <a:defRPr sz="1100"/>
+                      </a:pPr>
+                      <a:r>
+                        <a:t>✅ 기계 가동 중 연속 측정</a:t>
+                      </a:r>
+                    </a:p>
+                  </a:txBody>
+                  <a:tcPr>
+                    <a:solidFill>
+                      <a:srgbClr val="D6E4F0"/>
+                    </a:solidFill>
+                  </a:tcPr>
+                </a:tc>
+                <a:tc>
+                  <a:txBody>
+                    <a:bodyPr/>
+                    <a:lstStyle/>
+                    <a:p>
+                      <a:pPr algn="ctr">
+                        <a:defRPr sz="1100"/>
+                      </a:pPr>
+                      <a:r>
+                        <a:t>❌ 가동 중 촬영 불가</a:t>
+                      </a:r>
+                    </a:p>
+                  </a:txBody>
+                  <a:tcPr>
+                    <a:solidFill>
+                      <a:srgbClr val="EBF5EB"/>
+                    </a:solidFill>
+                  </a:tcPr>
+                </a:tc>
+              </a:tr>
+              <a:tr h="502920">
+                <a:tc>
+                  <a:txBody>
+                    <a:bodyPr/>
+                    <a:lstStyle/>
+                    <a:p>
+                      <a:pPr algn="ctr">
+                        <a:defRPr sz="1100"/>
+                      </a:pPr>
+                      <a:r>
+                        <a:t>비침습성</a:t>
+                      </a:r>
+                    </a:p>
+                  </a:txBody>
+                  <a:tcPr/>
+                </a:tc>
+                <a:tc>
+                  <a:txBody>
+                    <a:bodyPr/>
+                    <a:lstStyle/>
+                    <a:p>
+                      <a:pPr algn="ctr">
+                        <a:defRPr sz="1100"/>
+                      </a:pPr>
+                      <a:r>
+                        <a:t>✅ 외부 부착만으로 가능</a:t>
+                      </a:r>
+                    </a:p>
+                  </a:txBody>
+                  <a:tcPr>
+                    <a:solidFill>
+                      <a:srgbClr val="D6E4F0"/>
+                    </a:solidFill>
+                  </a:tcPr>
+                </a:tc>
+                <a:tc>
+                  <a:txBody>
+                    <a:bodyPr/>
+                    <a:lstStyle/>
+                    <a:p>
+                      <a:pPr algn="ctr">
+                        <a:defRPr sz="1100"/>
+                      </a:pPr>
+                      <a:r>
+                        <a:t>❌ 분해 필요</a:t>
+                      </a:r>
+                    </a:p>
+                  </a:txBody>
+                  <a:tcPr>
+                    <a:solidFill>
+                      <a:srgbClr val="EBF5EB"/>
+                    </a:solidFill>
+                  </a:tcPr>
+                </a:tc>
+              </a:tr>
+              <a:tr h="502920">
+                <a:tc>
+                  <a:txBody>
+                    <a:bodyPr/>
+                    <a:lstStyle/>
+                    <a:p>
+                      <a:pPr algn="ctr">
+                        <a:defRPr sz="1100"/>
+                      </a:pPr>
+                      <a:r>
+                        <a:t>FEMTO-ST 데이터셋</a:t>
+                      </a:r>
+                    </a:p>
+                  </a:txBody>
+                  <a:tcPr/>
+                </a:tc>
+                <a:tc>
+                  <a:txBody>
+                    <a:bodyPr/>
+                    <a:lstStyle/>
+                    <a:p>
+                      <a:pPr algn="ctr">
+                        <a:defRPr sz="1100"/>
+                      </a:pPr>
+                      <a:r>
+                        <a:t>✅ 이 방식 그 자체</a:t>
+                      </a:r>
+                    </a:p>
+                  </a:txBody>
+                  <a:tcPr>
+                    <a:solidFill>
+                      <a:srgbClr val="D6E4F0"/>
+                    </a:solidFill>
+                  </a:tcPr>
+                </a:tc>
+                <a:tc>
+                  <a:txBody>
+                    <a:bodyPr/>
+                    <a:lstStyle/>
+                    <a:p>
+                      <a:pPr algn="ctr">
+                        <a:defRPr sz="1100"/>
+                      </a:pPr>
+                      <a:r>
+                        <a:t>❌ 미포함</a:t>
+                      </a:r>
+                    </a:p>
+                  </a:txBody>
+                  <a:tcPr>
+                    <a:solidFill>
+                      <a:srgbClr val="EBF5EB"/>
+                    </a:solidFill>
+                  </a:tcPr>
+                </a:tc>
+              </a:tr>
+            </a:tbl>
+          </a:graphicData>
+        </a:graphic>
+      </p:graphicFrame>
+      <p:sp>
+        <p:nvSpPr>
+          <p:cNvPr id="4" name="TextBox 3"/>
+          <p:cNvSpPr txBox="1"/>
+          <p:nvPr/>
+        </p:nvSpPr>
+        <p:spPr>
+          <a:xfrm>
+            <a:off x="365760" y="4023360"/>
+            <a:ext cx="8412480" cy="502920"/>
+          </a:xfrm>
+          <a:prstGeom prst="rect">
+            <a:avLst/>
+          </a:prstGeom>
+          <a:noFill/>
+        </p:spPr>
+        <p:txBody>
+          <a:bodyPr wrap="none">
+            <a:spAutoFit/>
+          </a:bodyPr>
+          <a:lstStyle/>
+          <a:p>
+            <a:pPr>
+              <a:defRPr sz="1200" b="1">
+                <a:solidFill>
+                  <a:srgbClr val="1F497D"/>
+                </a:solidFill>
+              </a:defRPr>
+            </a:pPr>
+            <a:r>
+              <a:t>▶ 결론: 진동 RMS → matplotlib → CNN → Grad-CAM 방식이 실무 표준에 가장 가까움</a:t>
+            </a:r>
+          </a:p>
+        </p:txBody>
+      </p:sp>
+      <p:sp>
+        <p:nvSpPr>
+          <p:cNvPr id="5" name="TextBox 4"/>
+          <p:cNvSpPr txBox="1"/>
+          <p:nvPr/>
+        </p:nvSpPr>
+        <p:spPr>
+          <a:xfrm>
+            <a:off x="365760" y="4526280"/>
+            <a:ext cx="8412480" cy="548640"/>
+          </a:xfrm>
+          <a:prstGeom prst="rect">
+            <a:avLst/>
+          </a:prstGeom>
+          <a:noFill/>
+        </p:spPr>
+        <p:txBody>
+          <a:bodyPr wrap="none">
+            <a:spAutoFit/>
+          </a:bodyPr>
+          <a:lstStyle/>
+          <a:p>
+            <a:pPr>
+              <a:defRPr sz="1000">
+                <a:solidFill>
+                  <a:srgbClr val="606060"/>
+                </a:solidFill>
+              </a:defRPr>
+            </a:pPr>
+            <a:r>
+              <a:t>실제 베어링 사진 도입 시 → EfficientNetB0 (전이학습)  |  ResNet50 / VGG16 대안 가능</a:t>
+            </a:r>
+          </a:p>
+        </p:txBody>
+      </p:sp>
+    </p:spTree>
+  </p:cSld>
+  <p:clrMapOvr>
+    <a:masterClrMapping/>
+  </p:clrMapOvr>
+</p:sld>
+</file>
+
 <file path=ppt/slides/slide2.xml><?xml version="1.0" encoding="utf-8"?>
 <p:sld xmlns:a="http://schemas.openxmlformats.org/drawingml/2006/main" xmlns:r="http://schemas.openxmlformats.org/officeDocument/2006/relationships" xmlns:p="http://schemas.openxmlformats.org/presentationml/2006/main">
   <p:cSld name="Slide 2">
